--- a/assets/memos/A7-memo.pptx
+++ b/assets/memos/A7-memo.pptx
@@ -3084,9 +3084,12 @@
   <p:cSld>
     <p:bg>
       <p:bgPr>
-        <a:solidFill>
-          <a:srgbClr val="FFFFFF"/>
-        </a:solidFill>
+        <a:blipFill>
+          <a:blip r:embed="rId2"/>
+          <a:stretch>
+            <a:fillRect/>
+          </a:stretch>
+        </a:blipFill>
         <a:effectLst/>
       </p:bgPr>
     </p:bg>
@@ -3097,35 +3100,9 @@
         <p:nvPr/>
       </p:nvGrpSpPr>
       <p:grpSpPr/>
-      <p:pic>
-        <p:nvPicPr>
-          <p:cNvPr id="2" name="Picture 1" descr="bg-p1.png"/>
-          <p:cNvPicPr>
-            <a:picLocks noChangeAspect="1"/>
-          </p:cNvPicPr>
-          <p:nvPr/>
-        </p:nvPicPr>
-        <p:blipFill>
-          <a:blip r:embed="rId2">
-            <a:alphaModFix amt="80000"/>
-          </a:blip>
-          <a:stretch>
-            <a:fillRect/>
-          </a:stretch>
-        </p:blipFill>
-        <p:spPr>
-          <a:xfrm>
-            <a:off x="0" y="0"/>
-            <a:ext cx="7556399" cy="10692000"/>
-          </a:xfrm>
-          <a:prstGeom prst="rect">
-            <a:avLst/>
-          </a:prstGeom>
-        </p:spPr>
-      </p:pic>
-      <p:sp>
-        <p:nvSpPr>
-          <p:cNvPr id="3" name="TextBox 2"/>
+      <p:sp>
+        <p:nvSpPr>
+          <p:cNvPr id="2" name="TextBox 1"/>
           <p:cNvSpPr txBox="1"/>
           <p:nvPr/>
         </p:nvSpPr>
@@ -3186,7 +3163,7 @@
       </p:sp>
       <p:sp>
         <p:nvSpPr>
-          <p:cNvPr id="4" name="Rectangle 3"/>
+          <p:cNvPr id="3" name="Rectangle 2"/>
           <p:cNvSpPr/>
           <p:nvPr/>
         </p:nvSpPr>
@@ -3227,7 +3204,7 @@
       </p:sp>
       <p:sp>
         <p:nvSpPr>
-          <p:cNvPr id="5" name="Rectangle 4"/>
+          <p:cNvPr id="4" name="Rectangle 3"/>
           <p:cNvSpPr/>
           <p:nvPr/>
         </p:nvSpPr>
@@ -3268,7 +3245,7 @@
       </p:sp>
       <p:sp>
         <p:nvSpPr>
-          <p:cNvPr id="6" name="Rectangle 5"/>
+          <p:cNvPr id="5" name="Rectangle 4"/>
           <p:cNvSpPr/>
           <p:nvPr/>
         </p:nvSpPr>
@@ -3309,7 +3286,7 @@
       </p:sp>
       <p:sp>
         <p:nvSpPr>
-          <p:cNvPr id="7" name="TextBox 6"/>
+          <p:cNvPr id="6" name="TextBox 5"/>
           <p:cNvSpPr txBox="1"/>
           <p:nvPr/>
         </p:nvSpPr>
@@ -3351,7 +3328,7 @@
       </p:sp>
       <p:sp>
         <p:nvSpPr>
-          <p:cNvPr id="8" name="TextBox 7"/>
+          <p:cNvPr id="7" name="TextBox 6"/>
           <p:cNvSpPr txBox="1"/>
           <p:nvPr/>
         </p:nvSpPr>
@@ -3393,7 +3370,7 @@
       </p:sp>
       <p:sp>
         <p:nvSpPr>
-          <p:cNvPr id="9" name="TextBox 8"/>
+          <p:cNvPr id="8" name="TextBox 7"/>
           <p:cNvSpPr txBox="1"/>
           <p:nvPr/>
         </p:nvSpPr>
@@ -3492,7 +3469,7 @@
       </p:sp>
       <p:sp>
         <p:nvSpPr>
-          <p:cNvPr id="10" name="Rectangle 9"/>
+          <p:cNvPr id="9" name="Rectangle 8"/>
           <p:cNvSpPr/>
           <p:nvPr/>
         </p:nvSpPr>
@@ -3533,7 +3510,7 @@
       </p:sp>
       <p:sp>
         <p:nvSpPr>
-          <p:cNvPr id="11" name="Rectangle 10"/>
+          <p:cNvPr id="10" name="Rectangle 9"/>
           <p:cNvSpPr/>
           <p:nvPr/>
         </p:nvSpPr>
@@ -3574,7 +3551,7 @@
       </p:sp>
       <p:sp>
         <p:nvSpPr>
-          <p:cNvPr id="12" name="Rectangle 11"/>
+          <p:cNvPr id="11" name="Rectangle 10"/>
           <p:cNvSpPr/>
           <p:nvPr/>
         </p:nvSpPr>
@@ -3615,7 +3592,7 @@
       </p:sp>
       <p:sp>
         <p:nvSpPr>
-          <p:cNvPr id="13" name="TextBox 12"/>
+          <p:cNvPr id="12" name="TextBox 11"/>
           <p:cNvSpPr txBox="1"/>
           <p:nvPr/>
         </p:nvSpPr>
@@ -3657,7 +3634,7 @@
       </p:sp>
       <p:sp>
         <p:nvSpPr>
-          <p:cNvPr id="14" name="TextBox 13"/>
+          <p:cNvPr id="13" name="TextBox 12"/>
           <p:cNvSpPr txBox="1"/>
           <p:nvPr/>
         </p:nvSpPr>
@@ -3699,7 +3676,7 @@
       </p:sp>
       <p:sp>
         <p:nvSpPr>
-          <p:cNvPr id="15" name="TextBox 14"/>
+          <p:cNvPr id="14" name="TextBox 13"/>
           <p:cNvSpPr txBox="1"/>
           <p:nvPr/>
         </p:nvSpPr>
@@ -3798,7 +3775,7 @@
       </p:sp>
       <p:sp>
         <p:nvSpPr>
-          <p:cNvPr id="16" name="Rectangle 15"/>
+          <p:cNvPr id="15" name="Rectangle 14"/>
           <p:cNvSpPr/>
           <p:nvPr/>
         </p:nvSpPr>
@@ -3839,7 +3816,7 @@
       </p:sp>
       <p:sp>
         <p:nvSpPr>
-          <p:cNvPr id="17" name="Rectangle 16"/>
+          <p:cNvPr id="16" name="Rectangle 15"/>
           <p:cNvSpPr/>
           <p:nvPr/>
         </p:nvSpPr>
@@ -3880,7 +3857,7 @@
       </p:sp>
       <p:sp>
         <p:nvSpPr>
-          <p:cNvPr id="18" name="Rectangle 17"/>
+          <p:cNvPr id="17" name="Rectangle 16"/>
           <p:cNvSpPr/>
           <p:nvPr/>
         </p:nvSpPr>
@@ -3921,7 +3898,7 @@
       </p:sp>
       <p:sp>
         <p:nvSpPr>
-          <p:cNvPr id="19" name="TextBox 18"/>
+          <p:cNvPr id="18" name="TextBox 17"/>
           <p:cNvSpPr txBox="1"/>
           <p:nvPr/>
         </p:nvSpPr>
@@ -3963,7 +3940,7 @@
       </p:sp>
       <p:sp>
         <p:nvSpPr>
-          <p:cNvPr id="20" name="TextBox 19"/>
+          <p:cNvPr id="19" name="TextBox 18"/>
           <p:cNvSpPr txBox="1"/>
           <p:nvPr/>
         </p:nvSpPr>
@@ -4005,7 +3982,7 @@
       </p:sp>
       <p:sp>
         <p:nvSpPr>
-          <p:cNvPr id="21" name="TextBox 20"/>
+          <p:cNvPr id="20" name="TextBox 19"/>
           <p:cNvSpPr txBox="1"/>
           <p:nvPr/>
         </p:nvSpPr>
@@ -4085,7 +4062,7 @@
       </p:sp>
       <p:sp>
         <p:nvSpPr>
-          <p:cNvPr id="22" name="Rectangle 21"/>
+          <p:cNvPr id="21" name="Rectangle 20"/>
           <p:cNvSpPr/>
           <p:nvPr/>
         </p:nvSpPr>
@@ -4126,7 +4103,7 @@
       </p:sp>
       <p:sp>
         <p:nvSpPr>
-          <p:cNvPr id="23" name="Rectangle 22"/>
+          <p:cNvPr id="22" name="Rectangle 21"/>
           <p:cNvSpPr/>
           <p:nvPr/>
         </p:nvSpPr>
@@ -4167,7 +4144,7 @@
       </p:sp>
       <p:sp>
         <p:nvSpPr>
-          <p:cNvPr id="24" name="Rectangle 23"/>
+          <p:cNvPr id="23" name="Rectangle 22"/>
           <p:cNvSpPr/>
           <p:nvPr/>
         </p:nvSpPr>
@@ -4208,7 +4185,7 @@
       </p:sp>
       <p:sp>
         <p:nvSpPr>
-          <p:cNvPr id="25" name="TextBox 24"/>
+          <p:cNvPr id="24" name="TextBox 23"/>
           <p:cNvSpPr txBox="1"/>
           <p:nvPr/>
         </p:nvSpPr>
@@ -4250,7 +4227,7 @@
       </p:sp>
       <p:sp>
         <p:nvSpPr>
-          <p:cNvPr id="26" name="TextBox 25"/>
+          <p:cNvPr id="25" name="TextBox 24"/>
           <p:cNvSpPr txBox="1"/>
           <p:nvPr/>
         </p:nvSpPr>
@@ -4292,7 +4269,7 @@
       </p:sp>
       <p:sp>
         <p:nvSpPr>
-          <p:cNvPr id="27" name="TextBox 26"/>
+          <p:cNvPr id="26" name="TextBox 25"/>
           <p:cNvSpPr txBox="1"/>
           <p:nvPr/>
         </p:nvSpPr>
@@ -4391,7 +4368,7 @@
       </p:sp>
       <p:sp>
         <p:nvSpPr>
-          <p:cNvPr id="28" name="Rectangle 27"/>
+          <p:cNvPr id="27" name="Rectangle 26"/>
           <p:cNvSpPr/>
           <p:nvPr/>
         </p:nvSpPr>
@@ -4434,7 +4411,7 @@
       </p:sp>
       <p:sp>
         <p:nvSpPr>
-          <p:cNvPr id="29" name="TextBox 28"/>
+          <p:cNvPr id="28" name="TextBox 27"/>
           <p:cNvSpPr txBox="1"/>
           <p:nvPr/>
         </p:nvSpPr>
@@ -4495,7 +4472,7 @@
       </p:sp>
       <p:sp>
         <p:nvSpPr>
-          <p:cNvPr id="30" name="TextBox 29"/>
+          <p:cNvPr id="29" name="TextBox 28"/>
           <p:cNvSpPr txBox="1"/>
           <p:nvPr/>
         </p:nvSpPr>
@@ -4548,9 +4525,12 @@
   <p:cSld>
     <p:bg>
       <p:bgPr>
-        <a:solidFill>
-          <a:srgbClr val="FFFFFF"/>
-        </a:solidFill>
+        <a:blipFill>
+          <a:blip r:embed="rId2"/>
+          <a:stretch>
+            <a:fillRect/>
+          </a:stretch>
+        </a:blipFill>
         <a:effectLst/>
       </p:bgPr>
     </p:bg>
@@ -4561,35 +4541,9 @@
         <p:nvPr/>
       </p:nvGrpSpPr>
       <p:grpSpPr/>
-      <p:pic>
-        <p:nvPicPr>
-          <p:cNvPr id="2" name="Picture 1" descr="bg-p2.png"/>
-          <p:cNvPicPr>
-            <a:picLocks noChangeAspect="1"/>
-          </p:cNvPicPr>
-          <p:nvPr/>
-        </p:nvPicPr>
-        <p:blipFill>
-          <a:blip r:embed="rId2">
-            <a:alphaModFix amt="80000"/>
-          </a:blip>
-          <a:stretch>
-            <a:fillRect/>
-          </a:stretch>
-        </p:blipFill>
-        <p:spPr>
-          <a:xfrm>
-            <a:off x="0" y="0"/>
-            <a:ext cx="7556399" cy="10692000"/>
-          </a:xfrm>
-          <a:prstGeom prst="rect">
-            <a:avLst/>
-          </a:prstGeom>
-        </p:spPr>
-      </p:pic>
-      <p:sp>
-        <p:nvSpPr>
-          <p:cNvPr id="3" name="TextBox 2"/>
+      <p:sp>
+        <p:nvSpPr>
+          <p:cNvPr id="2" name="TextBox 1"/>
           <p:cNvSpPr txBox="1"/>
           <p:nvPr/>
         </p:nvSpPr>
@@ -4650,7 +4604,7 @@
       </p:sp>
       <p:sp>
         <p:nvSpPr>
-          <p:cNvPr id="4" name="Rectangle 3"/>
+          <p:cNvPr id="3" name="Rectangle 2"/>
           <p:cNvSpPr/>
           <p:nvPr/>
         </p:nvSpPr>
@@ -4691,7 +4645,7 @@
       </p:sp>
       <p:sp>
         <p:nvSpPr>
-          <p:cNvPr id="5" name="Rectangle 4"/>
+          <p:cNvPr id="4" name="Rectangle 3"/>
           <p:cNvSpPr/>
           <p:nvPr/>
         </p:nvSpPr>
@@ -4732,7 +4686,7 @@
       </p:sp>
       <p:sp>
         <p:nvSpPr>
-          <p:cNvPr id="6" name="Rectangle 5"/>
+          <p:cNvPr id="5" name="Rectangle 4"/>
           <p:cNvSpPr/>
           <p:nvPr/>
         </p:nvSpPr>
@@ -4773,7 +4727,7 @@
       </p:sp>
       <p:sp>
         <p:nvSpPr>
-          <p:cNvPr id="7" name="TextBox 6"/>
+          <p:cNvPr id="6" name="TextBox 5"/>
           <p:cNvSpPr txBox="1"/>
           <p:nvPr/>
         </p:nvSpPr>
@@ -4815,7 +4769,7 @@
       </p:sp>
       <p:sp>
         <p:nvSpPr>
-          <p:cNvPr id="8" name="TextBox 7"/>
+          <p:cNvPr id="7" name="TextBox 6"/>
           <p:cNvSpPr txBox="1"/>
           <p:nvPr/>
         </p:nvSpPr>
@@ -4857,7 +4811,7 @@
       </p:sp>
       <p:sp>
         <p:nvSpPr>
-          <p:cNvPr id="9" name="TextBox 8"/>
+          <p:cNvPr id="8" name="TextBox 7"/>
           <p:cNvSpPr txBox="1"/>
           <p:nvPr/>
         </p:nvSpPr>
@@ -4956,7 +4910,7 @@
       </p:sp>
       <p:sp>
         <p:nvSpPr>
-          <p:cNvPr id="10" name="Rectangle 9"/>
+          <p:cNvPr id="9" name="Rectangle 8"/>
           <p:cNvSpPr/>
           <p:nvPr/>
         </p:nvSpPr>
@@ -4997,7 +4951,7 @@
       </p:sp>
       <p:sp>
         <p:nvSpPr>
-          <p:cNvPr id="11" name="Rectangle 10"/>
+          <p:cNvPr id="10" name="Rectangle 9"/>
           <p:cNvSpPr/>
           <p:nvPr/>
         </p:nvSpPr>
@@ -5038,7 +4992,7 @@
       </p:sp>
       <p:sp>
         <p:nvSpPr>
-          <p:cNvPr id="12" name="Rectangle 11"/>
+          <p:cNvPr id="11" name="Rectangle 10"/>
           <p:cNvSpPr/>
           <p:nvPr/>
         </p:nvSpPr>
@@ -5079,7 +5033,7 @@
       </p:sp>
       <p:sp>
         <p:nvSpPr>
-          <p:cNvPr id="13" name="TextBox 12"/>
+          <p:cNvPr id="12" name="TextBox 11"/>
           <p:cNvSpPr txBox="1"/>
           <p:nvPr/>
         </p:nvSpPr>
@@ -5121,7 +5075,7 @@
       </p:sp>
       <p:sp>
         <p:nvSpPr>
-          <p:cNvPr id="14" name="TextBox 13"/>
+          <p:cNvPr id="13" name="TextBox 12"/>
           <p:cNvSpPr txBox="1"/>
           <p:nvPr/>
         </p:nvSpPr>
@@ -5163,7 +5117,7 @@
       </p:sp>
       <p:sp>
         <p:nvSpPr>
-          <p:cNvPr id="15" name="TextBox 14"/>
+          <p:cNvPr id="14" name="TextBox 13"/>
           <p:cNvSpPr txBox="1"/>
           <p:nvPr/>
         </p:nvSpPr>
@@ -5262,7 +5216,7 @@
       </p:sp>
       <p:sp>
         <p:nvSpPr>
-          <p:cNvPr id="16" name="Rectangle 15"/>
+          <p:cNvPr id="15" name="Rectangle 14"/>
           <p:cNvSpPr/>
           <p:nvPr/>
         </p:nvSpPr>
@@ -5303,7 +5257,7 @@
       </p:sp>
       <p:sp>
         <p:nvSpPr>
-          <p:cNvPr id="17" name="Rectangle 16"/>
+          <p:cNvPr id="16" name="Rectangle 15"/>
           <p:cNvSpPr/>
           <p:nvPr/>
         </p:nvSpPr>
@@ -5344,7 +5298,7 @@
       </p:sp>
       <p:sp>
         <p:nvSpPr>
-          <p:cNvPr id="18" name="Rectangle 17"/>
+          <p:cNvPr id="17" name="Rectangle 16"/>
           <p:cNvSpPr/>
           <p:nvPr/>
         </p:nvSpPr>
@@ -5385,7 +5339,7 @@
       </p:sp>
       <p:sp>
         <p:nvSpPr>
-          <p:cNvPr id="19" name="TextBox 18"/>
+          <p:cNvPr id="18" name="TextBox 17"/>
           <p:cNvSpPr txBox="1"/>
           <p:nvPr/>
         </p:nvSpPr>
@@ -5427,7 +5381,7 @@
       </p:sp>
       <p:sp>
         <p:nvSpPr>
-          <p:cNvPr id="20" name="TextBox 19"/>
+          <p:cNvPr id="19" name="TextBox 18"/>
           <p:cNvSpPr txBox="1"/>
           <p:nvPr/>
         </p:nvSpPr>
@@ -5469,7 +5423,7 @@
       </p:sp>
       <p:sp>
         <p:nvSpPr>
-          <p:cNvPr id="21" name="TextBox 20"/>
+          <p:cNvPr id="20" name="TextBox 19"/>
           <p:cNvSpPr txBox="1"/>
           <p:nvPr/>
         </p:nvSpPr>
@@ -5568,7 +5522,7 @@
       </p:sp>
       <p:sp>
         <p:nvSpPr>
-          <p:cNvPr id="22" name="Rectangle 21"/>
+          <p:cNvPr id="21" name="Rectangle 20"/>
           <p:cNvSpPr/>
           <p:nvPr/>
         </p:nvSpPr>
@@ -5611,7 +5565,7 @@
       </p:sp>
       <p:sp>
         <p:nvSpPr>
-          <p:cNvPr id="23" name="Rectangle 22"/>
+          <p:cNvPr id="22" name="Rectangle 21"/>
           <p:cNvSpPr/>
           <p:nvPr/>
         </p:nvSpPr>
@@ -5652,7 +5606,7 @@
       </p:sp>
       <p:sp>
         <p:nvSpPr>
-          <p:cNvPr id="24" name="TextBox 23"/>
+          <p:cNvPr id="23" name="TextBox 22"/>
           <p:cNvSpPr txBox="1"/>
           <p:nvPr/>
         </p:nvSpPr>
@@ -5770,7 +5724,7 @@
       </p:sp>
       <p:sp>
         <p:nvSpPr>
-          <p:cNvPr id="25" name="TextBox 24"/>
+          <p:cNvPr id="24" name="TextBox 23"/>
           <p:cNvSpPr txBox="1"/>
           <p:nvPr/>
         </p:nvSpPr>
